--- a/PPTX_Files_Judging/A7KqEBk.pptx
+++ b/PPTX_Files_Judging/A7KqEBk.pptx
@@ -7052,6 +7052,30 @@
           <a:xfrm>
             <a:off x="27939256" y="18733444"/>
             <a:ext cx="2235944" cy="2235944"/>
+          </a:xfrm>
+          <a:prstGeom prst="rect">
+            <a:avLst/>
+          </a:prstGeom>
+        </p:spPr>
+      </p:pic>
+      <p:pic>
+        <p:nvPicPr>
+          <p:cNvPr id="2051" name="Picture 2050" descr="55C.png"/>
+          <p:cNvPicPr>
+            <a:picLocks noChangeAspect="1"/>
+          </p:cNvPicPr>
+          <p:nvPr/>
+        </p:nvPicPr>
+        <p:blipFill>
+          <a:blip r:embed="rId7"/>
+          <a:stretch>
+            <a:fillRect/>
+          </a:stretch>
+        </p:blipFill>
+        <p:spPr>
+          <a:xfrm>
+            <a:off x="29279088" y="762000"/>
+            <a:ext cx="2103120" cy="3108960"/>
           </a:xfrm>
           <a:prstGeom prst="rect">
             <a:avLst/>
